--- a/apps/resources/bundled_files/5-klass-uch-burchtuk-ayanty-sabak.pptx
+++ b/apps/resources/bundled_files/5-klass-uch-burchtuk-ayanty-sabak.pptx
@@ -5196,7 +5196,7 @@
                 </a:solidFill>
                 <a:latin typeface="PT Sans"/>
               </a:rPr>
-              <a:t>5-класс · Математика</a:t>
+              <a:t/>
             </a:r>
           </a:p>
         </p:txBody>
@@ -5400,7 +5400,7 @@
                 </a:solidFill>
                 <a:latin typeface="PT Sans"/>
               </a:rPr>
-              <a:t>Китеп: Математика стандарты (2018), 5-класс «Геометриялык маалымат»; Cambridge 6Gg (үч бурчтуктун аянты, курама фигуралар). Кыргызча окуу китеби папкада жок; мазмуну, сандары жана окуясы толук жаңы.</a:t>
+              <a:t>Китеп: Математика стандарты (2018), 5-класс «Геометриялык маалымат» (үч бурчтуктун аянты, курама фигуралар). Кыргызча окуу китеби папкада жок; мазмуну, сандары жана окуясы толук жаңы.</a:t>
             </a:r>
           </a:p>
         </p:txBody>
@@ -5688,7 +5688,7 @@
                 </a:solidFill>
                 <a:latin typeface="PT Sans"/>
               </a:rPr>
-              <a:t>5-класс ›</a:t>
+              <a:t/>
             </a:r>
           </a:p>
           <a:p>
@@ -8778,7 +8778,7 @@
                 </a:solidFill>
                 <a:latin typeface="PT Sans"/>
               </a:rPr>
-              <a:t>5-класс ›</a:t>
+              <a:t/>
             </a:r>
           </a:p>
           <a:p>
@@ -14522,7 +14522,7 @@
                 </a:solidFill>
                 <a:latin typeface="PT Sans"/>
               </a:rPr>
-              <a:t>5-класс ›</a:t>
+              <a:t/>
             </a:r>
           </a:p>
           <a:p>
@@ -18259,7 +18259,7 @@
                 </a:solidFill>
                 <a:latin typeface="PT Sans"/>
               </a:rPr>
-              <a:t>5-класс ›</a:t>
+              <a:t/>
             </a:r>
           </a:p>
           <a:p>
@@ -19589,7 +19589,7 @@
                 </a:solidFill>
                 <a:latin typeface="PT Sans"/>
               </a:rPr>
-              <a:t>5-класс ›</a:t>
+              <a:t/>
             </a:r>
           </a:p>
           <a:p>
@@ -21259,7 +21259,7 @@
                 </a:solidFill>
                 <a:latin typeface="PT Sans"/>
               </a:rPr>
-              <a:t>5-класс ›</a:t>
+              <a:t/>
             </a:r>
           </a:p>
           <a:p>
@@ -23114,7 +23114,7 @@
                 </a:solidFill>
                 <a:latin typeface="PT Sans"/>
               </a:rPr>
-              <a:t>5-класс ›</a:t>
+              <a:t/>
             </a:r>
           </a:p>
           <a:p>
@@ -24702,7 +24702,7 @@
                 </a:solidFill>
                 <a:latin typeface="PT Sans"/>
               </a:rPr>
-              <a:t>5-класс ›</a:t>
+              <a:t/>
             </a:r>
           </a:p>
           <a:p>
@@ -25786,7 +25786,7 @@
                 </a:solidFill>
                 <a:latin typeface="PT Sans"/>
               </a:rPr>
-              <a:t>5-класс ›</a:t>
+              <a:t/>
             </a:r>
           </a:p>
           <a:p>
@@ -27316,7 +27316,7 @@
                 </a:solidFill>
                 <a:latin typeface="PT Sans"/>
               </a:rPr>
-              <a:t>5-класс ›</a:t>
+              <a:t/>
             </a:r>
           </a:p>
           <a:p>
@@ -28987,7 +28987,7 @@
                 </a:solidFill>
                 <a:latin typeface="PT Sans"/>
               </a:rPr>
-              <a:t>5-класс ›</a:t>
+              <a:t/>
             </a:r>
           </a:p>
           <a:p>
@@ -30264,7 +30264,7 @@
                 </a:solidFill>
                 <a:latin typeface="PT Sans"/>
               </a:rPr>
-              <a:t>5-класс ›</a:t>
+              <a:t/>
             </a:r>
           </a:p>
           <a:p>
@@ -31692,7 +31692,7 @@
                 </a:solidFill>
                 <a:latin typeface="PT Sans"/>
               </a:rPr>
-              <a:t>5-класс ›</a:t>
+              <a:t/>
             </a:r>
           </a:p>
           <a:p>
@@ -33148,7 +33148,7 @@
                 </a:solidFill>
                 <a:latin typeface="PT Sans"/>
               </a:rPr>
-              <a:t>5-класс ›</a:t>
+              <a:t/>
             </a:r>
           </a:p>
           <a:p>
@@ -34311,7 +34311,7 @@
                 </a:solidFill>
                 <a:latin typeface="PT Sans"/>
               </a:rPr>
-              <a:t>5-класс ›</a:t>
+              <a:t/>
             </a:r>
           </a:p>
           <a:p>
@@ -35111,7 +35111,7 @@
                 </a:solidFill>
                 <a:latin typeface="PT Sans"/>
               </a:rPr>
-              <a:t>5-класс ›</a:t>
+              <a:t/>
             </a:r>
           </a:p>
           <a:p>
@@ -35952,7 +35952,7 @@
                 </a:solidFill>
                 <a:latin typeface="PT Sans"/>
               </a:rPr>
-              <a:t>5-класс ›</a:t>
+              <a:t/>
             </a:r>
           </a:p>
           <a:p>
@@ -36901,7 +36901,7 @@
                 </a:solidFill>
                 <a:latin typeface="PT Sans"/>
               </a:rPr>
-              <a:t>5-класс ›</a:t>
+              <a:t/>
             </a:r>
           </a:p>
           <a:p>
@@ -38355,7 +38355,7 @@
                 </a:solidFill>
                 <a:latin typeface="PT Sans"/>
               </a:rPr>
-              <a:t>5-класс ›</a:t>
+              <a:t/>
             </a:r>
           </a:p>
           <a:p>
@@ -39101,7 +39101,7 @@
                 </a:solidFill>
                 <a:latin typeface="PT Sans"/>
               </a:rPr>
-              <a:t>5-класс ›</a:t>
+              <a:t/>
             </a:r>
           </a:p>
           <a:p>
@@ -39909,7 +39909,7 @@
                 </a:solidFill>
                 <a:latin typeface="PT Sans"/>
               </a:rPr>
-              <a:t>5-класс ›</a:t>
+              <a:t/>
             </a:r>
           </a:p>
           <a:p>
@@ -41100,7 +41100,7 @@
                 </a:solidFill>
                 <a:latin typeface="PT Sans"/>
               </a:rPr>
-              <a:t>5-класс ›</a:t>
+              <a:t/>
             </a:r>
           </a:p>
           <a:p>
@@ -42279,7 +42279,7 @@
                 </a:solidFill>
                 <a:latin typeface="PT Sans"/>
               </a:rPr>
-              <a:t>5-класс ›</a:t>
+              <a:t/>
             </a:r>
           </a:p>
           <a:p>
@@ -42460,7 +42460,7 @@
                 </a:solidFill>
                 <a:latin typeface="PT Sans"/>
               </a:rPr>
-              <a:t>3–4-класс</a:t>
+              <a:t/>
             </a:r>
           </a:p>
         </p:txBody>
@@ -42640,7 +42640,7 @@
                 </a:solidFill>
                 <a:latin typeface="PT Sans"/>
               </a:rPr>
-              <a:t>5-класс</a:t>
+              <a:t/>
             </a:r>
           </a:p>
         </p:txBody>
@@ -42820,7 +42820,7 @@
                 </a:solidFill>
                 <a:latin typeface="PT Sans"/>
               </a:rPr>
-              <a:t>5-класс</a:t>
+              <a:t/>
             </a:r>
           </a:p>
         </p:txBody>
@@ -43075,7 +43075,7 @@
                 </a:solidFill>
                 <a:latin typeface="PT Sans"/>
               </a:rPr>
-              <a:t>6-класс</a:t>
+              <a:t/>
             </a:r>
           </a:p>
         </p:txBody>
@@ -43495,7 +43495,7 @@
                 </a:solidFill>
                 <a:latin typeface="PT Sans"/>
               </a:rPr>
-              <a:t>5-класс ›</a:t>
+              <a:t/>
             </a:r>
           </a:p>
           <a:p>
@@ -44643,7 +44643,7 @@
                 </a:solidFill>
                 <a:latin typeface="PT Sans"/>
               </a:rPr>
-              <a:t>5-класс ›</a:t>
+              <a:t/>
             </a:r>
           </a:p>
           <a:p>

--- a/apps/resources/bundled_files/5-klass-uch-burchtuk-ayanty-sabak.pptx
+++ b/apps/resources/bundled_files/5-klass-uch-burchtuk-ayanty-sabak.pptx
@@ -1582,7 +1582,7 @@
           <a:lstStyle/>
           <a:p>
             <a:r>
-              <a:t>Ой жүгүртүү маданияты (Wenxi Lee, 2.6).</a:t>
+              <a:t>Ой жүгүртүү маданияты (Wenxi Lee, 2,6).</a:t>
             </a:r>
           </a:p>
         </p:txBody>
